--- a/test/c_e_up.pptx
+++ b/test/c_e_up.pptx
@@ -3097,7 +3097,7 @@
         <p:spPr>
           <a:xfrm>
             <a:off x="0" y="0"/>
-            <a:ext cx="6858000" cy="6040049"/>
+            <a:ext cx="6858000" cy="2768356"/>
           </a:xfrm>
           <a:custGeom>
             <a:avLst/>
@@ -3106,387 +3106,1062 @@
             <a:cxnLst/>
             <a:rect l="l" t="t" r="r" b="b"/>
             <a:pathLst>
-              <a:path w="6858000" h="6040049">
+              <a:path w="6858000" h="2768356">
                 <a:moveTo>
-                  <a:pt x="0" y="4156177"/>
+                  <a:pt x="0" y="1904914"/>
                 </a:moveTo>
                 <a:lnTo>
-                  <a:pt x="5231" y="3861448"/>
-                </a:lnTo>
-                <a:lnTo>
-                  <a:pt x="20899" y="3568203"/>
-                </a:lnTo>
-                <a:lnTo>
-                  <a:pt x="46924" y="3277918"/>
-                </a:lnTo>
-                <a:lnTo>
-                  <a:pt x="83176" y="2992055"/>
-                </a:lnTo>
-                <a:lnTo>
-                  <a:pt x="129473" y="2712053"/>
-                </a:lnTo>
-                <a:lnTo>
-                  <a:pt x="185580" y="2439321"/>
-                </a:lnTo>
-                <a:lnTo>
-                  <a:pt x="251215" y="2175233"/>
-                </a:lnTo>
-                <a:lnTo>
-                  <a:pt x="326049" y="1921118"/>
-                </a:lnTo>
-                <a:lnTo>
-                  <a:pt x="409704" y="1678256"/>
-                </a:lnTo>
-                <a:lnTo>
-                  <a:pt x="501759" y="1447870"/>
-                </a:lnTo>
-                <a:lnTo>
-                  <a:pt x="601751" y="1231118"/>
-                </a:lnTo>
-                <a:lnTo>
-                  <a:pt x="709176" y="1029093"/>
-                </a:lnTo>
-                <a:lnTo>
-                  <a:pt x="823493" y="842812"/>
-                </a:lnTo>
-                <a:lnTo>
-                  <a:pt x="944127" y="673212"/>
-                </a:lnTo>
-                <a:lnTo>
-                  <a:pt x="1070471" y="521148"/>
-                </a:lnTo>
-                <a:lnTo>
-                  <a:pt x="1201888" y="387384"/>
-                </a:lnTo>
-                <a:lnTo>
-                  <a:pt x="1337717" y="272595"/>
-                </a:lnTo>
-                <a:lnTo>
-                  <a:pt x="1477274" y="177358"/>
-                </a:lnTo>
-                <a:lnTo>
-                  <a:pt x="1619857" y="102153"/>
-                </a:lnTo>
-                <a:lnTo>
-                  <a:pt x="1764746" y="47358"/>
-                </a:lnTo>
-                <a:lnTo>
-                  <a:pt x="1911214" y="13250"/>
-                </a:lnTo>
-                <a:lnTo>
-                  <a:pt x="2058522" y="0"/>
-                </a:lnTo>
-                <a:lnTo>
-                  <a:pt x="2205930" y="7674"/>
-                </a:lnTo>
-                <a:lnTo>
-                  <a:pt x="2352694" y="36234"/>
-                </a:lnTo>
-                <a:lnTo>
-                  <a:pt x="2498076" y="85537"/>
-                </a:lnTo>
-                <a:lnTo>
-                  <a:pt x="2641344" y="155334"/>
-                </a:lnTo>
-                <a:lnTo>
-                  <a:pt x="2781777" y="245273"/>
-                </a:lnTo>
-                <a:lnTo>
-                  <a:pt x="2918668" y="354902"/>
-                </a:lnTo>
-                <a:lnTo>
-                  <a:pt x="3051327" y="483670"/>
-                </a:lnTo>
-                <a:lnTo>
-                  <a:pt x="3179086" y="630926"/>
-                </a:lnTo>
-                <a:lnTo>
-                  <a:pt x="3301303" y="795931"/>
-                </a:lnTo>
-                <a:lnTo>
-                  <a:pt x="3417362" y="977854"/>
-                </a:lnTo>
-                <a:lnTo>
-                  <a:pt x="3526679" y="1175778"/>
-                </a:lnTo>
-                <a:lnTo>
-                  <a:pt x="3628703" y="1388707"/>
-                </a:lnTo>
-                <a:lnTo>
-                  <a:pt x="3722921" y="1615570"/>
-                </a:lnTo>
-                <a:lnTo>
-                  <a:pt x="3808858" y="1855223"/>
-                </a:lnTo>
-                <a:lnTo>
-                  <a:pt x="3886082" y="2106461"/>
-                </a:lnTo>
-                <a:lnTo>
-                  <a:pt x="3954204" y="2368018"/>
-                </a:lnTo>
-                <a:lnTo>
-                  <a:pt x="4012881" y="2638578"/>
-                </a:lnTo>
-                <a:lnTo>
-                  <a:pt x="4061818" y="2916779"/>
-                </a:lnTo>
-                <a:lnTo>
-                  <a:pt x="4100767" y="3201219"/>
-                </a:lnTo>
-                <a:lnTo>
-                  <a:pt x="4129534" y="3490467"/>
-                </a:lnTo>
-                <a:lnTo>
-                  <a:pt x="4147973" y="3783067"/>
-                </a:lnTo>
-                <a:lnTo>
-                  <a:pt x="4155991" y="4077545"/>
-                </a:lnTo>
-                <a:lnTo>
-                  <a:pt x="4153549" y="4372419"/>
-                </a:lnTo>
-                <a:lnTo>
-                  <a:pt x="4140657" y="4666205"/>
-                </a:lnTo>
-                <a:lnTo>
-                  <a:pt x="4117382" y="4957422"/>
-                </a:lnTo>
-                <a:lnTo>
-                  <a:pt x="4083841" y="5244606"/>
-                </a:lnTo>
-                <a:lnTo>
-                  <a:pt x="4040202" y="5526310"/>
-                </a:lnTo>
-                <a:lnTo>
-                  <a:pt x="4040202" y="5526310"/>
-                </a:lnTo>
-                <a:lnTo>
-                  <a:pt x="4023656" y="5596628"/>
-                </a:lnTo>
-                <a:lnTo>
-                  <a:pt x="3999049" y="5664547"/>
-                </a:lnTo>
-                <a:lnTo>
-                  <a:pt x="3966715" y="5729145"/>
-                </a:lnTo>
-                <a:lnTo>
-                  <a:pt x="3927091" y="5789547"/>
-                </a:lnTo>
-                <a:lnTo>
-                  <a:pt x="3880716" y="5844934"/>
-                </a:lnTo>
-                <a:lnTo>
-                  <a:pt x="3828216" y="5894555"/>
-                </a:lnTo>
-                <a:lnTo>
-                  <a:pt x="3770305" y="5937738"/>
-                </a:lnTo>
-                <a:lnTo>
-                  <a:pt x="3707768" y="5973897"/>
-                </a:lnTo>
-                <a:lnTo>
-                  <a:pt x="3641451" y="6002542"/>
-                </a:lnTo>
-                <a:lnTo>
-                  <a:pt x="3572254" y="6023285"/>
-                </a:lnTo>
-                <a:lnTo>
-                  <a:pt x="3501116" y="6035844"/>
-                </a:lnTo>
-                <a:lnTo>
-                  <a:pt x="3429000" y="6040049"/>
-                </a:lnTo>
-                <a:lnTo>
-                  <a:pt x="3356883" y="6035844"/>
-                </a:lnTo>
-                <a:lnTo>
-                  <a:pt x="3285745" y="6023285"/>
-                </a:lnTo>
-                <a:lnTo>
-                  <a:pt x="3216548" y="6002542"/>
-                </a:lnTo>
-                <a:lnTo>
-                  <a:pt x="3150231" y="5973897"/>
-                </a:lnTo>
-                <a:lnTo>
-                  <a:pt x="3087694" y="5937738"/>
-                </a:lnTo>
-                <a:lnTo>
-                  <a:pt x="3029783" y="5894555"/>
-                </a:lnTo>
-                <a:lnTo>
-                  <a:pt x="2977283" y="5844934"/>
-                </a:lnTo>
-                <a:lnTo>
-                  <a:pt x="2930908" y="5789547"/>
-                </a:lnTo>
-                <a:lnTo>
-                  <a:pt x="2891284" y="5729145"/>
-                </a:lnTo>
-                <a:lnTo>
-                  <a:pt x="2858950" y="5664547"/>
-                </a:lnTo>
-                <a:lnTo>
-                  <a:pt x="2834343" y="5596628"/>
-                </a:lnTo>
-                <a:lnTo>
-                  <a:pt x="2817797" y="5526310"/>
-                </a:lnTo>
-                <a:lnTo>
-                  <a:pt x="2817797" y="5526310"/>
-                </a:lnTo>
-                <a:lnTo>
-                  <a:pt x="2774158" y="5244606"/>
-                </a:lnTo>
-                <a:lnTo>
-                  <a:pt x="2740617" y="4957422"/>
-                </a:lnTo>
-                <a:lnTo>
-                  <a:pt x="2717342" y="4666205"/>
-                </a:lnTo>
-                <a:lnTo>
-                  <a:pt x="2704450" y="4372419"/>
-                </a:lnTo>
-                <a:lnTo>
-                  <a:pt x="2702008" y="4077545"/>
-                </a:lnTo>
-                <a:lnTo>
-                  <a:pt x="2710026" y="3783067"/>
-                </a:lnTo>
-                <a:lnTo>
-                  <a:pt x="2728465" y="3490467"/>
-                </a:lnTo>
-                <a:lnTo>
-                  <a:pt x="2757232" y="3201219"/>
-                </a:lnTo>
-                <a:lnTo>
-                  <a:pt x="2796181" y="2916779"/>
-                </a:lnTo>
-                <a:lnTo>
-                  <a:pt x="2845118" y="2638578"/>
-                </a:lnTo>
-                <a:lnTo>
-                  <a:pt x="2903795" y="2368018"/>
-                </a:lnTo>
-                <a:lnTo>
-                  <a:pt x="2971917" y="2106461"/>
-                </a:lnTo>
-                <a:lnTo>
-                  <a:pt x="3049141" y="1855223"/>
-                </a:lnTo>
-                <a:lnTo>
-                  <a:pt x="3135078" y="1615570"/>
-                </a:lnTo>
-                <a:lnTo>
-                  <a:pt x="3229296" y="1388707"/>
-                </a:lnTo>
-                <a:lnTo>
-                  <a:pt x="3331320" y="1175778"/>
-                </a:lnTo>
-                <a:lnTo>
-                  <a:pt x="3440637" y="977854"/>
-                </a:lnTo>
-                <a:lnTo>
-                  <a:pt x="3556696" y="795931"/>
-                </a:lnTo>
-                <a:lnTo>
-                  <a:pt x="3678913" y="630926"/>
-                </a:lnTo>
-                <a:lnTo>
-                  <a:pt x="3806672" y="483670"/>
-                </a:lnTo>
-                <a:lnTo>
-                  <a:pt x="3939331" y="354902"/>
-                </a:lnTo>
-                <a:lnTo>
-                  <a:pt x="4076222" y="245273"/>
-                </a:lnTo>
-                <a:lnTo>
-                  <a:pt x="4216655" y="155334"/>
-                </a:lnTo>
-                <a:lnTo>
-                  <a:pt x="4359923" y="85537"/>
-                </a:lnTo>
-                <a:lnTo>
-                  <a:pt x="4505305" y="36234"/>
-                </a:lnTo>
-                <a:lnTo>
-                  <a:pt x="4652069" y="7674"/>
-                </a:lnTo>
-                <a:lnTo>
-                  <a:pt x="4799477" y="0"/>
-                </a:lnTo>
-                <a:lnTo>
-                  <a:pt x="4946785" y="13250"/>
-                </a:lnTo>
-                <a:lnTo>
-                  <a:pt x="5093253" y="47358"/>
-                </a:lnTo>
-                <a:lnTo>
-                  <a:pt x="5238142" y="102153"/>
-                </a:lnTo>
-                <a:lnTo>
-                  <a:pt x="5380725" y="177358"/>
-                </a:lnTo>
-                <a:lnTo>
-                  <a:pt x="5520282" y="272595"/>
-                </a:lnTo>
-                <a:lnTo>
-                  <a:pt x="5656111" y="387384"/>
-                </a:lnTo>
-                <a:lnTo>
-                  <a:pt x="5787528" y="521148"/>
-                </a:lnTo>
-                <a:lnTo>
-                  <a:pt x="5913872" y="673212"/>
-                </a:lnTo>
-                <a:lnTo>
-                  <a:pt x="6034506" y="842812"/>
-                </a:lnTo>
-                <a:lnTo>
-                  <a:pt x="6148823" y="1029093"/>
-                </a:lnTo>
-                <a:lnTo>
-                  <a:pt x="6256248" y="1231118"/>
-                </a:lnTo>
-                <a:lnTo>
-                  <a:pt x="6356240" y="1447870"/>
-                </a:lnTo>
-                <a:lnTo>
-                  <a:pt x="6448295" y="1678256"/>
-                </a:lnTo>
-                <a:lnTo>
-                  <a:pt x="6531950" y="1921118"/>
-                </a:lnTo>
-                <a:lnTo>
-                  <a:pt x="6606784" y="2175233"/>
-                </a:lnTo>
-                <a:lnTo>
-                  <a:pt x="6672419" y="2439321"/>
-                </a:lnTo>
-                <a:lnTo>
-                  <a:pt x="6728526" y="2712053"/>
-                </a:lnTo>
-                <a:lnTo>
-                  <a:pt x="6774823" y="2992055"/>
-                </a:lnTo>
-                <a:lnTo>
-                  <a:pt x="6811075" y="3277918"/>
-                </a:lnTo>
-                <a:lnTo>
-                  <a:pt x="6837100" y="3568203"/>
-                </a:lnTo>
-                <a:lnTo>
-                  <a:pt x="6852768" y="3861448"/>
-                </a:lnTo>
-                <a:lnTo>
-                  <a:pt x="6858000" y="4156177"/>
+                  <a:pt x="2397" y="1769830"/>
+                </a:lnTo>
+                <a:lnTo>
+                  <a:pt x="9578" y="1635426"/>
+                </a:lnTo>
+                <a:lnTo>
+                  <a:pt x="21507" y="1502379"/>
+                </a:lnTo>
+                <a:lnTo>
+                  <a:pt x="38122" y="1371358"/>
+                </a:lnTo>
+                <a:lnTo>
+                  <a:pt x="59341" y="1243024"/>
+                </a:lnTo>
+                <a:lnTo>
+                  <a:pt x="85057" y="1118022"/>
+                </a:lnTo>
+                <a:lnTo>
+                  <a:pt x="115140" y="996982"/>
+                </a:lnTo>
+                <a:lnTo>
+                  <a:pt x="149439" y="880512"/>
+                </a:lnTo>
+                <a:lnTo>
+                  <a:pt x="187781" y="769201"/>
+                </a:lnTo>
+                <a:lnTo>
+                  <a:pt x="229973" y="663607"/>
+                </a:lnTo>
+                <a:lnTo>
+                  <a:pt x="275802" y="564262"/>
+                </a:lnTo>
+                <a:lnTo>
+                  <a:pt x="325039" y="471667"/>
+                </a:lnTo>
+                <a:lnTo>
+                  <a:pt x="377434" y="386289"/>
+                </a:lnTo>
+                <a:lnTo>
+                  <a:pt x="432725" y="308555"/>
+                </a:lnTo>
+                <a:lnTo>
+                  <a:pt x="490632" y="238859"/>
+                </a:lnTo>
+                <a:lnTo>
+                  <a:pt x="550865" y="177551"/>
+                </a:lnTo>
+                <a:lnTo>
+                  <a:pt x="613120" y="124939"/>
+                </a:lnTo>
+                <a:lnTo>
+                  <a:pt x="677084" y="81289"/>
+                </a:lnTo>
+                <a:lnTo>
+                  <a:pt x="742434" y="46820"/>
+                </a:lnTo>
+                <a:lnTo>
+                  <a:pt x="808842" y="21706"/>
+                </a:lnTo>
+                <a:lnTo>
+                  <a:pt x="875973" y="6073"/>
+                </a:lnTo>
+                <a:lnTo>
+                  <a:pt x="943489" y="0"/>
+                </a:lnTo>
+                <a:lnTo>
+                  <a:pt x="1011051" y="3517"/>
+                </a:lnTo>
+                <a:lnTo>
+                  <a:pt x="1078318" y="16607"/>
+                </a:lnTo>
+                <a:lnTo>
+                  <a:pt x="1144951" y="39204"/>
+                </a:lnTo>
+                <a:lnTo>
+                  <a:pt x="1210616" y="71194"/>
+                </a:lnTo>
+                <a:lnTo>
+                  <a:pt x="1274981" y="112417"/>
+                </a:lnTo>
+                <a:lnTo>
+                  <a:pt x="1337722" y="162663"/>
+                </a:lnTo>
+                <a:lnTo>
+                  <a:pt x="1398524" y="221682"/>
+                </a:lnTo>
+                <a:lnTo>
+                  <a:pt x="1457081" y="289174"/>
+                </a:lnTo>
+                <a:lnTo>
+                  <a:pt x="1513097" y="364802"/>
+                </a:lnTo>
+                <a:lnTo>
+                  <a:pt x="1566291" y="448183"/>
+                </a:lnTo>
+                <a:lnTo>
+                  <a:pt x="1616394" y="538898"/>
+                </a:lnTo>
+                <a:lnTo>
+                  <a:pt x="1663155" y="636491"/>
+                </a:lnTo>
+                <a:lnTo>
+                  <a:pt x="1706338" y="740469"/>
+                </a:lnTo>
+                <a:lnTo>
+                  <a:pt x="1745726" y="850310"/>
+                </a:lnTo>
+                <a:lnTo>
+                  <a:pt x="1781121" y="965461"/>
+                </a:lnTo>
+                <a:lnTo>
+                  <a:pt x="1812343" y="1085341"/>
+                </a:lnTo>
+                <a:lnTo>
+                  <a:pt x="1839237" y="1209348"/>
+                </a:lnTo>
+                <a:lnTo>
+                  <a:pt x="1861666" y="1336857"/>
+                </a:lnTo>
+                <a:lnTo>
+                  <a:pt x="1879518" y="1467225"/>
+                </a:lnTo>
+                <a:lnTo>
+                  <a:pt x="1892703" y="1599797"/>
+                </a:lnTo>
+                <a:lnTo>
+                  <a:pt x="1901154" y="1733905"/>
+                </a:lnTo>
+                <a:lnTo>
+                  <a:pt x="1904829" y="1868875"/>
+                </a:lnTo>
+                <a:lnTo>
+                  <a:pt x="1903710" y="2004025"/>
+                </a:lnTo>
+                <a:lnTo>
+                  <a:pt x="1897801" y="2138677"/>
+                </a:lnTo>
+                <a:lnTo>
+                  <a:pt x="1887133" y="2272152"/>
+                </a:lnTo>
+                <a:lnTo>
+                  <a:pt x="1871760" y="2403778"/>
+                </a:lnTo>
+                <a:lnTo>
+                  <a:pt x="1851759" y="2532892"/>
+                </a:lnTo>
+                <a:lnTo>
+                  <a:pt x="1851759" y="2532892"/>
+                </a:lnTo>
+                <a:lnTo>
+                  <a:pt x="1844175" y="2565121"/>
+                </a:lnTo>
+                <a:lnTo>
+                  <a:pt x="1832897" y="2596250"/>
+                </a:lnTo>
+                <a:lnTo>
+                  <a:pt x="1818077" y="2625858"/>
+                </a:lnTo>
+                <a:lnTo>
+                  <a:pt x="1799917" y="2653542"/>
+                </a:lnTo>
+                <a:lnTo>
+                  <a:pt x="1778661" y="2678928"/>
+                </a:lnTo>
+                <a:lnTo>
+                  <a:pt x="1754599" y="2701671"/>
+                </a:lnTo>
+                <a:lnTo>
+                  <a:pt x="1728056" y="2721463"/>
+                </a:lnTo>
+                <a:lnTo>
+                  <a:pt x="1699393" y="2738036"/>
+                </a:lnTo>
+                <a:lnTo>
+                  <a:pt x="1668998" y="2751165"/>
+                </a:lnTo>
+                <a:lnTo>
+                  <a:pt x="1637283" y="2760672"/>
+                </a:lnTo>
+                <a:lnTo>
+                  <a:pt x="1604678" y="2766428"/>
+                </a:lnTo>
+                <a:lnTo>
+                  <a:pt x="1571625" y="2768356"/>
+                </a:lnTo>
+                <a:lnTo>
+                  <a:pt x="1538571" y="2766428"/>
+                </a:lnTo>
+                <a:lnTo>
+                  <a:pt x="1505966" y="2760672"/>
+                </a:lnTo>
+                <a:lnTo>
+                  <a:pt x="1474251" y="2751165"/>
+                </a:lnTo>
+                <a:lnTo>
+                  <a:pt x="1443856" y="2738036"/>
+                </a:lnTo>
+                <a:lnTo>
+                  <a:pt x="1415193" y="2721463"/>
+                </a:lnTo>
+                <a:lnTo>
+                  <a:pt x="1388650" y="2701671"/>
+                </a:lnTo>
+                <a:lnTo>
+                  <a:pt x="1364588" y="2678928"/>
+                </a:lnTo>
+                <a:lnTo>
+                  <a:pt x="1343332" y="2653542"/>
+                </a:lnTo>
+                <a:lnTo>
+                  <a:pt x="1325172" y="2625858"/>
+                </a:lnTo>
+                <a:lnTo>
+                  <a:pt x="1310352" y="2596250"/>
+                </a:lnTo>
+                <a:lnTo>
+                  <a:pt x="1299074" y="2565121"/>
+                </a:lnTo>
+                <a:lnTo>
+                  <a:pt x="1291490" y="2532892"/>
+                </a:lnTo>
+                <a:lnTo>
+                  <a:pt x="1291490" y="2532892"/>
+                </a:lnTo>
+                <a:lnTo>
+                  <a:pt x="1269800" y="2391162"/>
+                </a:lnTo>
+                <a:lnTo>
+                  <a:pt x="1253686" y="2246488"/>
+                </a:lnTo>
+                <a:lnTo>
+                  <a:pt x="1243244" y="2099746"/>
+                </a:lnTo>
+                <a:lnTo>
+                  <a:pt x="1238538" y="1951825"/>
+                </a:lnTo>
+                <a:lnTo>
+                  <a:pt x="1239597" y="1803620"/>
+                </a:lnTo>
+                <a:lnTo>
+                  <a:pt x="1246414" y="1656028"/>
+                </a:lnTo>
+                <a:lnTo>
+                  <a:pt x="1258947" y="1509943"/>
+                </a:lnTo>
+                <a:lnTo>
+                  <a:pt x="1277122" y="1366248"/>
+                </a:lnTo>
+                <a:lnTo>
+                  <a:pt x="1300827" y="1225815"/>
+                </a:lnTo>
+                <a:lnTo>
+                  <a:pt x="1329919" y="1089493"/>
+                </a:lnTo>
+                <a:lnTo>
+                  <a:pt x="1364223" y="958107"/>
+                </a:lnTo>
+                <a:lnTo>
+                  <a:pt x="1403531" y="832453"/>
+                </a:lnTo>
+                <a:lnTo>
+                  <a:pt x="1447604" y="713292"/>
+                </a:lnTo>
+                <a:lnTo>
+                  <a:pt x="1496176" y="601344"/>
+                </a:lnTo>
+                <a:lnTo>
+                  <a:pt x="1548953" y="497288"/>
+                </a:lnTo>
+                <a:lnTo>
+                  <a:pt x="1605615" y="401753"/>
+                </a:lnTo>
+                <a:lnTo>
+                  <a:pt x="1665819" y="315318"/>
+                </a:lnTo>
+                <a:lnTo>
+                  <a:pt x="1729201" y="238506"/>
+                </a:lnTo>
+                <a:lnTo>
+                  <a:pt x="1795377" y="171782"/>
+                </a:lnTo>
+                <a:lnTo>
+                  <a:pt x="1863947" y="115550"/>
+                </a:lnTo>
+                <a:lnTo>
+                  <a:pt x="1934495" y="70150"/>
+                </a:lnTo>
+                <a:lnTo>
+                  <a:pt x="2006594" y="35858"/>
+                </a:lnTo>
+                <a:lnTo>
+                  <a:pt x="2079809" y="12880"/>
+                </a:lnTo>
+                <a:lnTo>
+                  <a:pt x="2153694" y="1356"/>
+                </a:lnTo>
+                <a:lnTo>
+                  <a:pt x="2227805" y="1356"/>
+                </a:lnTo>
+                <a:lnTo>
+                  <a:pt x="2301690" y="12880"/>
+                </a:lnTo>
+                <a:lnTo>
+                  <a:pt x="2374905" y="35858"/>
+                </a:lnTo>
+                <a:lnTo>
+                  <a:pt x="2447004" y="70150"/>
+                </a:lnTo>
+                <a:lnTo>
+                  <a:pt x="2517552" y="115550"/>
+                </a:lnTo>
+                <a:lnTo>
+                  <a:pt x="2586122" y="171782"/>
+                </a:lnTo>
+                <a:lnTo>
+                  <a:pt x="2652298" y="238506"/>
+                </a:lnTo>
+                <a:lnTo>
+                  <a:pt x="2715680" y="315318"/>
+                </a:lnTo>
+                <a:lnTo>
+                  <a:pt x="2775884" y="401753"/>
+                </a:lnTo>
+                <a:lnTo>
+                  <a:pt x="2832546" y="497288"/>
+                </a:lnTo>
+                <a:lnTo>
+                  <a:pt x="2885323" y="601344"/>
+                </a:lnTo>
+                <a:lnTo>
+                  <a:pt x="2933895" y="713292"/>
+                </a:lnTo>
+                <a:lnTo>
+                  <a:pt x="2977968" y="832453"/>
+                </a:lnTo>
+                <a:lnTo>
+                  <a:pt x="3017276" y="958107"/>
+                </a:lnTo>
+                <a:lnTo>
+                  <a:pt x="3051580" y="1089493"/>
+                </a:lnTo>
+                <a:lnTo>
+                  <a:pt x="3080672" y="1225815"/>
+                </a:lnTo>
+                <a:lnTo>
+                  <a:pt x="3104377" y="1366248"/>
+                </a:lnTo>
+                <a:lnTo>
+                  <a:pt x="3122552" y="1509943"/>
+                </a:lnTo>
+                <a:lnTo>
+                  <a:pt x="3135085" y="1656028"/>
+                </a:lnTo>
+                <a:lnTo>
+                  <a:pt x="3141902" y="1803620"/>
+                </a:lnTo>
+                <a:lnTo>
+                  <a:pt x="3142961" y="1951825"/>
+                </a:lnTo>
+                <a:lnTo>
+                  <a:pt x="3138255" y="2099746"/>
+                </a:lnTo>
+                <a:lnTo>
+                  <a:pt x="3127813" y="2246488"/>
+                </a:lnTo>
+                <a:lnTo>
+                  <a:pt x="3111699" y="2391162"/>
+                </a:lnTo>
+                <a:lnTo>
+                  <a:pt x="3090009" y="2532892"/>
+                </a:lnTo>
+                <a:lnTo>
+                  <a:pt x="3090009" y="2532892"/>
+                </a:lnTo>
+                <a:lnTo>
+                  <a:pt x="3082425" y="2565121"/>
+                </a:lnTo>
+                <a:lnTo>
+                  <a:pt x="3071147" y="2596250"/>
+                </a:lnTo>
+                <a:lnTo>
+                  <a:pt x="3056327" y="2625858"/>
+                </a:lnTo>
+                <a:lnTo>
+                  <a:pt x="3038167" y="2653542"/>
+                </a:lnTo>
+                <a:lnTo>
+                  <a:pt x="3016911" y="2678928"/>
+                </a:lnTo>
+                <a:lnTo>
+                  <a:pt x="2992849" y="2701671"/>
+                </a:lnTo>
+                <a:lnTo>
+                  <a:pt x="2966306" y="2721463"/>
+                </a:lnTo>
+                <a:lnTo>
+                  <a:pt x="2937643" y="2738036"/>
+                </a:lnTo>
+                <a:lnTo>
+                  <a:pt x="2907248" y="2751165"/>
+                </a:lnTo>
+                <a:lnTo>
+                  <a:pt x="2875533" y="2760672"/>
+                </a:lnTo>
+                <a:lnTo>
+                  <a:pt x="2842928" y="2766428"/>
+                </a:lnTo>
+                <a:lnTo>
+                  <a:pt x="2809875" y="2768356"/>
+                </a:lnTo>
+                <a:lnTo>
+                  <a:pt x="2776821" y="2766428"/>
+                </a:lnTo>
+                <a:lnTo>
+                  <a:pt x="2744216" y="2760672"/>
+                </a:lnTo>
+                <a:lnTo>
+                  <a:pt x="2712501" y="2751165"/>
+                </a:lnTo>
+                <a:lnTo>
+                  <a:pt x="2682106" y="2738036"/>
+                </a:lnTo>
+                <a:lnTo>
+                  <a:pt x="2653443" y="2721463"/>
+                </a:lnTo>
+                <a:lnTo>
+                  <a:pt x="2626900" y="2701671"/>
+                </a:lnTo>
+                <a:lnTo>
+                  <a:pt x="2602838" y="2678928"/>
+                </a:lnTo>
+                <a:lnTo>
+                  <a:pt x="2581582" y="2653542"/>
+                </a:lnTo>
+                <a:lnTo>
+                  <a:pt x="2563422" y="2625858"/>
+                </a:lnTo>
+                <a:lnTo>
+                  <a:pt x="2548602" y="2596250"/>
+                </a:lnTo>
+                <a:lnTo>
+                  <a:pt x="2537324" y="2565121"/>
+                </a:lnTo>
+                <a:lnTo>
+                  <a:pt x="2529740" y="2532892"/>
+                </a:lnTo>
+                <a:lnTo>
+                  <a:pt x="2529740" y="2532892"/>
+                </a:lnTo>
+                <a:lnTo>
+                  <a:pt x="2508050" y="2391162"/>
+                </a:lnTo>
+                <a:lnTo>
+                  <a:pt x="2491936" y="2246488"/>
+                </a:lnTo>
+                <a:lnTo>
+                  <a:pt x="2481494" y="2099746"/>
+                </a:lnTo>
+                <a:lnTo>
+                  <a:pt x="2476788" y="1951825"/>
+                </a:lnTo>
+                <a:lnTo>
+                  <a:pt x="2477847" y="1803620"/>
+                </a:lnTo>
+                <a:lnTo>
+                  <a:pt x="2484664" y="1656028"/>
+                </a:lnTo>
+                <a:lnTo>
+                  <a:pt x="2497197" y="1509943"/>
+                </a:lnTo>
+                <a:lnTo>
+                  <a:pt x="2515372" y="1366248"/>
+                </a:lnTo>
+                <a:lnTo>
+                  <a:pt x="2539077" y="1225815"/>
+                </a:lnTo>
+                <a:lnTo>
+                  <a:pt x="2568169" y="1089493"/>
+                </a:lnTo>
+                <a:lnTo>
+                  <a:pt x="2602473" y="958107"/>
+                </a:lnTo>
+                <a:lnTo>
+                  <a:pt x="2641781" y="832453"/>
+                </a:lnTo>
+                <a:lnTo>
+                  <a:pt x="2685854" y="713292"/>
+                </a:lnTo>
+                <a:lnTo>
+                  <a:pt x="2734426" y="601344"/>
+                </a:lnTo>
+                <a:lnTo>
+                  <a:pt x="2787203" y="497288"/>
+                </a:lnTo>
+                <a:lnTo>
+                  <a:pt x="2843865" y="401753"/>
+                </a:lnTo>
+                <a:lnTo>
+                  <a:pt x="2904069" y="315318"/>
+                </a:lnTo>
+                <a:lnTo>
+                  <a:pt x="2967451" y="238506"/>
+                </a:lnTo>
+                <a:lnTo>
+                  <a:pt x="3033627" y="171782"/>
+                </a:lnTo>
+                <a:lnTo>
+                  <a:pt x="3102197" y="115550"/>
+                </a:lnTo>
+                <a:lnTo>
+                  <a:pt x="3172745" y="70150"/>
+                </a:lnTo>
+                <a:lnTo>
+                  <a:pt x="3244844" y="35858"/>
+                </a:lnTo>
+                <a:lnTo>
+                  <a:pt x="3318059" y="12880"/>
+                </a:lnTo>
+                <a:lnTo>
+                  <a:pt x="3391944" y="1356"/>
+                </a:lnTo>
+                <a:lnTo>
+                  <a:pt x="3466055" y="1356"/>
+                </a:lnTo>
+                <a:lnTo>
+                  <a:pt x="3539940" y="12880"/>
+                </a:lnTo>
+                <a:lnTo>
+                  <a:pt x="3613155" y="35858"/>
+                </a:lnTo>
+                <a:lnTo>
+                  <a:pt x="3685254" y="70150"/>
+                </a:lnTo>
+                <a:lnTo>
+                  <a:pt x="3755802" y="115550"/>
+                </a:lnTo>
+                <a:lnTo>
+                  <a:pt x="3824372" y="171782"/>
+                </a:lnTo>
+                <a:lnTo>
+                  <a:pt x="3890548" y="238506"/>
+                </a:lnTo>
+                <a:lnTo>
+                  <a:pt x="3953930" y="315318"/>
+                </a:lnTo>
+                <a:lnTo>
+                  <a:pt x="4014134" y="401753"/>
+                </a:lnTo>
+                <a:lnTo>
+                  <a:pt x="4070796" y="497288"/>
+                </a:lnTo>
+                <a:lnTo>
+                  <a:pt x="4123573" y="601344"/>
+                </a:lnTo>
+                <a:lnTo>
+                  <a:pt x="4172145" y="713292"/>
+                </a:lnTo>
+                <a:lnTo>
+                  <a:pt x="4216218" y="832453"/>
+                </a:lnTo>
+                <a:lnTo>
+                  <a:pt x="4255526" y="958107"/>
+                </a:lnTo>
+                <a:lnTo>
+                  <a:pt x="4289830" y="1089493"/>
+                </a:lnTo>
+                <a:lnTo>
+                  <a:pt x="4318922" y="1225815"/>
+                </a:lnTo>
+                <a:lnTo>
+                  <a:pt x="4342627" y="1366248"/>
+                </a:lnTo>
+                <a:lnTo>
+                  <a:pt x="4360802" y="1509943"/>
+                </a:lnTo>
+                <a:lnTo>
+                  <a:pt x="4373335" y="1656028"/>
+                </a:lnTo>
+                <a:lnTo>
+                  <a:pt x="4380152" y="1803620"/>
+                </a:lnTo>
+                <a:lnTo>
+                  <a:pt x="4381211" y="1951825"/>
+                </a:lnTo>
+                <a:lnTo>
+                  <a:pt x="4376505" y="2099746"/>
+                </a:lnTo>
+                <a:lnTo>
+                  <a:pt x="4366063" y="2246488"/>
+                </a:lnTo>
+                <a:lnTo>
+                  <a:pt x="4349949" y="2391162"/>
+                </a:lnTo>
+                <a:lnTo>
+                  <a:pt x="4328259" y="2532892"/>
+                </a:lnTo>
+                <a:lnTo>
+                  <a:pt x="4328259" y="2532892"/>
+                </a:lnTo>
+                <a:lnTo>
+                  <a:pt x="4320675" y="2565121"/>
+                </a:lnTo>
+                <a:lnTo>
+                  <a:pt x="4309397" y="2596250"/>
+                </a:lnTo>
+                <a:lnTo>
+                  <a:pt x="4294577" y="2625858"/>
+                </a:lnTo>
+                <a:lnTo>
+                  <a:pt x="4276417" y="2653542"/>
+                </a:lnTo>
+                <a:lnTo>
+                  <a:pt x="4255161" y="2678928"/>
+                </a:lnTo>
+                <a:lnTo>
+                  <a:pt x="4231099" y="2701671"/>
+                </a:lnTo>
+                <a:lnTo>
+                  <a:pt x="4204556" y="2721463"/>
+                </a:lnTo>
+                <a:lnTo>
+                  <a:pt x="4175893" y="2738036"/>
+                </a:lnTo>
+                <a:lnTo>
+                  <a:pt x="4145498" y="2751165"/>
+                </a:lnTo>
+                <a:lnTo>
+                  <a:pt x="4113783" y="2760672"/>
+                </a:lnTo>
+                <a:lnTo>
+                  <a:pt x="4081178" y="2766428"/>
+                </a:lnTo>
+                <a:lnTo>
+                  <a:pt x="4048125" y="2768356"/>
+                </a:lnTo>
+                <a:lnTo>
+                  <a:pt x="4015071" y="2766428"/>
+                </a:lnTo>
+                <a:lnTo>
+                  <a:pt x="3982466" y="2760672"/>
+                </a:lnTo>
+                <a:lnTo>
+                  <a:pt x="3950751" y="2751165"/>
+                </a:lnTo>
+                <a:lnTo>
+                  <a:pt x="3920356" y="2738036"/>
+                </a:lnTo>
+                <a:lnTo>
+                  <a:pt x="3891693" y="2721463"/>
+                </a:lnTo>
+                <a:lnTo>
+                  <a:pt x="3865150" y="2701671"/>
+                </a:lnTo>
+                <a:lnTo>
+                  <a:pt x="3841088" y="2678928"/>
+                </a:lnTo>
+                <a:lnTo>
+                  <a:pt x="3819832" y="2653542"/>
+                </a:lnTo>
+                <a:lnTo>
+                  <a:pt x="3801672" y="2625858"/>
+                </a:lnTo>
+                <a:lnTo>
+                  <a:pt x="3786852" y="2596250"/>
+                </a:lnTo>
+                <a:lnTo>
+                  <a:pt x="3775574" y="2565121"/>
+                </a:lnTo>
+                <a:lnTo>
+                  <a:pt x="3767990" y="2532892"/>
+                </a:lnTo>
+                <a:lnTo>
+                  <a:pt x="3767990" y="2532892"/>
+                </a:lnTo>
+                <a:lnTo>
+                  <a:pt x="3746300" y="2391162"/>
+                </a:lnTo>
+                <a:lnTo>
+                  <a:pt x="3730186" y="2246488"/>
+                </a:lnTo>
+                <a:lnTo>
+                  <a:pt x="3719744" y="2099746"/>
+                </a:lnTo>
+                <a:lnTo>
+                  <a:pt x="3715038" y="1951825"/>
+                </a:lnTo>
+                <a:lnTo>
+                  <a:pt x="3716097" y="1803620"/>
+                </a:lnTo>
+                <a:lnTo>
+                  <a:pt x="3722914" y="1656028"/>
+                </a:lnTo>
+                <a:lnTo>
+                  <a:pt x="3735447" y="1509943"/>
+                </a:lnTo>
+                <a:lnTo>
+                  <a:pt x="3753622" y="1366248"/>
+                </a:lnTo>
+                <a:lnTo>
+                  <a:pt x="3777327" y="1225815"/>
+                </a:lnTo>
+                <a:lnTo>
+                  <a:pt x="3806419" y="1089493"/>
+                </a:lnTo>
+                <a:lnTo>
+                  <a:pt x="3840723" y="958107"/>
+                </a:lnTo>
+                <a:lnTo>
+                  <a:pt x="3880031" y="832453"/>
+                </a:lnTo>
+                <a:lnTo>
+                  <a:pt x="3924104" y="713292"/>
+                </a:lnTo>
+                <a:lnTo>
+                  <a:pt x="3972676" y="601344"/>
+                </a:lnTo>
+                <a:lnTo>
+                  <a:pt x="4025453" y="497288"/>
+                </a:lnTo>
+                <a:lnTo>
+                  <a:pt x="4082115" y="401753"/>
+                </a:lnTo>
+                <a:lnTo>
+                  <a:pt x="4142319" y="315318"/>
+                </a:lnTo>
+                <a:lnTo>
+                  <a:pt x="4205701" y="238506"/>
+                </a:lnTo>
+                <a:lnTo>
+                  <a:pt x="4271877" y="171782"/>
+                </a:lnTo>
+                <a:lnTo>
+                  <a:pt x="4340447" y="115550"/>
+                </a:lnTo>
+                <a:lnTo>
+                  <a:pt x="4410995" y="70150"/>
+                </a:lnTo>
+                <a:lnTo>
+                  <a:pt x="4483094" y="35858"/>
+                </a:lnTo>
+                <a:lnTo>
+                  <a:pt x="4556309" y="12880"/>
+                </a:lnTo>
+                <a:lnTo>
+                  <a:pt x="4630194" y="1356"/>
+                </a:lnTo>
+                <a:lnTo>
+                  <a:pt x="4704305" y="1356"/>
+                </a:lnTo>
+                <a:lnTo>
+                  <a:pt x="4778190" y="12880"/>
+                </a:lnTo>
+                <a:lnTo>
+                  <a:pt x="4851405" y="35858"/>
+                </a:lnTo>
+                <a:lnTo>
+                  <a:pt x="4923504" y="70150"/>
+                </a:lnTo>
+                <a:lnTo>
+                  <a:pt x="4994052" y="115550"/>
+                </a:lnTo>
+                <a:lnTo>
+                  <a:pt x="5062622" y="171782"/>
+                </a:lnTo>
+                <a:lnTo>
+                  <a:pt x="5128798" y="238506"/>
+                </a:lnTo>
+                <a:lnTo>
+                  <a:pt x="5192180" y="315318"/>
+                </a:lnTo>
+                <a:lnTo>
+                  <a:pt x="5252384" y="401753"/>
+                </a:lnTo>
+                <a:lnTo>
+                  <a:pt x="5309046" y="497288"/>
+                </a:lnTo>
+                <a:lnTo>
+                  <a:pt x="5361823" y="601344"/>
+                </a:lnTo>
+                <a:lnTo>
+                  <a:pt x="5410395" y="713292"/>
+                </a:lnTo>
+                <a:lnTo>
+                  <a:pt x="5454468" y="832453"/>
+                </a:lnTo>
+                <a:lnTo>
+                  <a:pt x="5493776" y="958107"/>
+                </a:lnTo>
+                <a:lnTo>
+                  <a:pt x="5528080" y="1089493"/>
+                </a:lnTo>
+                <a:lnTo>
+                  <a:pt x="5557172" y="1225815"/>
+                </a:lnTo>
+                <a:lnTo>
+                  <a:pt x="5580877" y="1366248"/>
+                </a:lnTo>
+                <a:lnTo>
+                  <a:pt x="5599052" y="1509943"/>
+                </a:lnTo>
+                <a:lnTo>
+                  <a:pt x="5611585" y="1656028"/>
+                </a:lnTo>
+                <a:lnTo>
+                  <a:pt x="5618402" y="1803620"/>
+                </a:lnTo>
+                <a:lnTo>
+                  <a:pt x="5619461" y="1951825"/>
+                </a:lnTo>
+                <a:lnTo>
+                  <a:pt x="5614755" y="2099746"/>
+                </a:lnTo>
+                <a:lnTo>
+                  <a:pt x="5604313" y="2246488"/>
+                </a:lnTo>
+                <a:lnTo>
+                  <a:pt x="5588199" y="2391162"/>
+                </a:lnTo>
+                <a:lnTo>
+                  <a:pt x="5566509" y="2532892"/>
+                </a:lnTo>
+                <a:lnTo>
+                  <a:pt x="5566509" y="2532892"/>
+                </a:lnTo>
+                <a:lnTo>
+                  <a:pt x="5558925" y="2565121"/>
+                </a:lnTo>
+                <a:lnTo>
+                  <a:pt x="5547647" y="2596250"/>
+                </a:lnTo>
+                <a:lnTo>
+                  <a:pt x="5532827" y="2625858"/>
+                </a:lnTo>
+                <a:lnTo>
+                  <a:pt x="5514667" y="2653542"/>
+                </a:lnTo>
+                <a:lnTo>
+                  <a:pt x="5493411" y="2678928"/>
+                </a:lnTo>
+                <a:lnTo>
+                  <a:pt x="5469349" y="2701671"/>
+                </a:lnTo>
+                <a:lnTo>
+                  <a:pt x="5442806" y="2721463"/>
+                </a:lnTo>
+                <a:lnTo>
+                  <a:pt x="5414143" y="2738036"/>
+                </a:lnTo>
+                <a:lnTo>
+                  <a:pt x="5383748" y="2751165"/>
+                </a:lnTo>
+                <a:lnTo>
+                  <a:pt x="5352033" y="2760672"/>
+                </a:lnTo>
+                <a:lnTo>
+                  <a:pt x="5319428" y="2766428"/>
+                </a:lnTo>
+                <a:lnTo>
+                  <a:pt x="5286375" y="2768356"/>
+                </a:lnTo>
+                <a:lnTo>
+                  <a:pt x="5253321" y="2766428"/>
+                </a:lnTo>
+                <a:lnTo>
+                  <a:pt x="5220716" y="2760672"/>
+                </a:lnTo>
+                <a:lnTo>
+                  <a:pt x="5189001" y="2751165"/>
+                </a:lnTo>
+                <a:lnTo>
+                  <a:pt x="5158606" y="2738036"/>
+                </a:lnTo>
+                <a:lnTo>
+                  <a:pt x="5129943" y="2721463"/>
+                </a:lnTo>
+                <a:lnTo>
+                  <a:pt x="5103400" y="2701671"/>
+                </a:lnTo>
+                <a:lnTo>
+                  <a:pt x="5079338" y="2678928"/>
+                </a:lnTo>
+                <a:lnTo>
+                  <a:pt x="5058082" y="2653542"/>
+                </a:lnTo>
+                <a:lnTo>
+                  <a:pt x="5039922" y="2625858"/>
+                </a:lnTo>
+                <a:lnTo>
+                  <a:pt x="5025102" y="2596250"/>
+                </a:lnTo>
+                <a:lnTo>
+                  <a:pt x="5013824" y="2565121"/>
+                </a:lnTo>
+                <a:lnTo>
+                  <a:pt x="5006240" y="2532892"/>
+                </a:lnTo>
+                <a:lnTo>
+                  <a:pt x="5006240" y="2532892"/>
+                </a:lnTo>
+                <a:lnTo>
+                  <a:pt x="4986239" y="2403778"/>
+                </a:lnTo>
+                <a:lnTo>
+                  <a:pt x="4970866" y="2272152"/>
+                </a:lnTo>
+                <a:lnTo>
+                  <a:pt x="4960198" y="2138677"/>
+                </a:lnTo>
+                <a:lnTo>
+                  <a:pt x="4954289" y="2004025"/>
+                </a:lnTo>
+                <a:lnTo>
+                  <a:pt x="4953170" y="1868875"/>
+                </a:lnTo>
+                <a:lnTo>
+                  <a:pt x="4956845" y="1733905"/>
+                </a:lnTo>
+                <a:lnTo>
+                  <a:pt x="4965296" y="1599797"/>
+                </a:lnTo>
+                <a:lnTo>
+                  <a:pt x="4978481" y="1467225"/>
+                </a:lnTo>
+                <a:lnTo>
+                  <a:pt x="4996333" y="1336857"/>
+                </a:lnTo>
+                <a:lnTo>
+                  <a:pt x="5018762" y="1209348"/>
+                </a:lnTo>
+                <a:lnTo>
+                  <a:pt x="5045656" y="1085341"/>
+                </a:lnTo>
+                <a:lnTo>
+                  <a:pt x="5076878" y="965461"/>
+                </a:lnTo>
+                <a:lnTo>
+                  <a:pt x="5112273" y="850310"/>
+                </a:lnTo>
+                <a:lnTo>
+                  <a:pt x="5151661" y="740469"/>
+                </a:lnTo>
+                <a:lnTo>
+                  <a:pt x="5194844" y="636491"/>
+                </a:lnTo>
+                <a:lnTo>
+                  <a:pt x="5241605" y="538898"/>
+                </a:lnTo>
+                <a:lnTo>
+                  <a:pt x="5291708" y="448183"/>
+                </a:lnTo>
+                <a:lnTo>
+                  <a:pt x="5344902" y="364802"/>
+                </a:lnTo>
+                <a:lnTo>
+                  <a:pt x="5400918" y="289174"/>
+                </a:lnTo>
+                <a:lnTo>
+                  <a:pt x="5459475" y="221682"/>
+                </a:lnTo>
+                <a:lnTo>
+                  <a:pt x="5520277" y="162663"/>
+                </a:lnTo>
+                <a:lnTo>
+                  <a:pt x="5583018" y="112417"/>
+                </a:lnTo>
+                <a:lnTo>
+                  <a:pt x="5647383" y="71194"/>
+                </a:lnTo>
+                <a:lnTo>
+                  <a:pt x="5713048" y="39204"/>
+                </a:lnTo>
+                <a:lnTo>
+                  <a:pt x="5779681" y="16607"/>
+                </a:lnTo>
+                <a:lnTo>
+                  <a:pt x="5846948" y="3517"/>
+                </a:lnTo>
+                <a:lnTo>
+                  <a:pt x="5914510" y="0"/>
+                </a:lnTo>
+                <a:lnTo>
+                  <a:pt x="5982026" y="6073"/>
+                </a:lnTo>
+                <a:lnTo>
+                  <a:pt x="6049157" y="21706"/>
+                </a:lnTo>
+                <a:lnTo>
+                  <a:pt x="6115565" y="46820"/>
+                </a:lnTo>
+                <a:lnTo>
+                  <a:pt x="6180915" y="81289"/>
+                </a:lnTo>
+                <a:lnTo>
+                  <a:pt x="6244879" y="124939"/>
+                </a:lnTo>
+                <a:lnTo>
+                  <a:pt x="6307134" y="177551"/>
+                </a:lnTo>
+                <a:lnTo>
+                  <a:pt x="6367367" y="238859"/>
+                </a:lnTo>
+                <a:lnTo>
+                  <a:pt x="6425274" y="308555"/>
+                </a:lnTo>
+                <a:lnTo>
+                  <a:pt x="6480565" y="386289"/>
+                </a:lnTo>
+                <a:lnTo>
+                  <a:pt x="6532960" y="471667"/>
+                </a:lnTo>
+                <a:lnTo>
+                  <a:pt x="6582197" y="564262"/>
+                </a:lnTo>
+                <a:lnTo>
+                  <a:pt x="6628026" y="663607"/>
+                </a:lnTo>
+                <a:lnTo>
+                  <a:pt x="6670218" y="769201"/>
+                </a:lnTo>
+                <a:lnTo>
+                  <a:pt x="6708560" y="880512"/>
+                </a:lnTo>
+                <a:lnTo>
+                  <a:pt x="6742859" y="996982"/>
+                </a:lnTo>
+                <a:lnTo>
+                  <a:pt x="6772942" y="1118022"/>
+                </a:lnTo>
+                <a:lnTo>
+                  <a:pt x="6798658" y="1243024"/>
+                </a:lnTo>
+                <a:lnTo>
+                  <a:pt x="6819877" y="1371358"/>
+                </a:lnTo>
+                <a:lnTo>
+                  <a:pt x="6836492" y="1502379"/>
+                </a:lnTo>
+                <a:lnTo>
+                  <a:pt x="6848421" y="1635426"/>
+                </a:lnTo>
+                <a:lnTo>
+                  <a:pt x="6855602" y="1769830"/>
+                </a:lnTo>
+                <a:lnTo>
+                  <a:pt x="6858000" y="1904914"/>
                 </a:lnTo>
               </a:path>
             </a:pathLst>
           </a:custGeom>
           <a:noFill/>
-          <a:ln w="4572">
+          <a:ln w="9144">
             <a:solidFill>
               <a:srgbClr val="0000FF"/>
             </a:solidFill>
